--- a/cb-point/درس برنامه نویسیe158AM2.pptx
+++ b/cb-point/درس برنامه نویسیe158AM2.pptx
@@ -5380,7 +5380,7 @@
               <a:rPr lang="fa-IR" dirty="0" err="1">
                 <a:sym typeface="Wingdings" pitchFamily="2" charset="2"/>
               </a:rPr>
-              <a:t>دوتانت</a:t>
+              <a:t>آپارات</a:t>
             </a:r>
             <a:r>
               <a:rPr lang="en-US" dirty="0">
@@ -5719,7 +5719,20 @@
           <a:bodyPr/>
           <a:lstStyle/>
           <a:p>
-            <a:endParaRPr lang="en-AE"/>
+            <a:pPr algn="l" defTabSz="914400" rtl="1" eaLnBrk="1" latinLnBrk="0" hangingPunct="1">
+              <a:lnSpc>
+                <a:spcPct val="90000"/>
+              </a:lnSpc>
+              <a:spcBef>
+                <a:spcPct val="0"/>
+              </a:spcBef>
+              <a:buNone/>
+            </a:pPr>
+            <a:r>
+              <a:rPr lang="fa-IR" dirty="0"/>
+              <a:t>درس ۴</a:t>
+            </a:r>
+            <a:endParaRPr lang="en-AE" dirty="0"/>
           </a:p>
         </p:txBody>
       </p:sp>
@@ -5741,10 +5754,204 @@
         </p:nvSpPr>
         <p:spPr/>
         <p:txBody>
-          <a:bodyPr/>
+          <a:bodyPr>
+            <a:normAutofit fontScale="92500" lnSpcReduction="20000"/>
+          </a:bodyPr>
           <a:lstStyle/>
           <a:p>
-            <a:endParaRPr lang="en-AE"/>
+            <a:pPr algn="r" rtl="1"/>
+            <a:r>
+              <a:rPr lang="fa-IR" dirty="0"/>
+              <a:t>ما  در  درس ۳ بهتون یاد دادیم که چطور می </a:t>
+            </a:r>
+            <a:r>
+              <a:rPr lang="fa-IR" dirty="0" err="1"/>
+              <a:t>تونید</a:t>
+            </a:r>
+            <a:r>
+              <a:rPr lang="fa-IR" dirty="0"/>
+              <a:t> یک سایت ساده و کوچک که در آن نوشته به سایت من خوش آمدید و به سایت </a:t>
+            </a:r>
+            <a:r>
+              <a:rPr lang="fa-IR" dirty="0" err="1"/>
+              <a:t>آپارات</a:t>
+            </a:r>
+            <a:r>
+              <a:rPr lang="fa-IR" dirty="0"/>
+              <a:t>  لینک </a:t>
+            </a:r>
+            <a:r>
+              <a:rPr lang="fa-IR" dirty="0" err="1"/>
+              <a:t>گزاشتیم</a:t>
+            </a:r>
+            <a:r>
+              <a:rPr lang="fa-IR" dirty="0"/>
+              <a:t>.</a:t>
+            </a:r>
+          </a:p>
+          <a:p>
+            <a:pPr algn="r" rtl="1"/>
+            <a:r>
+              <a:rPr lang="fa-IR" dirty="0"/>
+              <a:t>حالا ما می خواهیم برویم و درس چهارم را یاد بگیریم.</a:t>
+            </a:r>
+          </a:p>
+          <a:p>
+            <a:pPr algn="r" rtl="1"/>
+            <a:r>
+              <a:rPr lang="fa-IR" dirty="0"/>
+              <a:t>درس ۴ :</a:t>
+            </a:r>
+          </a:p>
+          <a:p>
+            <a:pPr algn="r" rtl="1"/>
+            <a:r>
+              <a:rPr lang="fa-IR" dirty="0"/>
+              <a:t>بعد از این که روی </a:t>
+            </a:r>
+            <a:r>
+              <a:rPr lang="fa-IR" dirty="0" err="1"/>
+              <a:t>فایلی</a:t>
+            </a:r>
+            <a:r>
+              <a:rPr lang="fa-IR" dirty="0"/>
+              <a:t> که در درس ۳ درست کردیم </a:t>
+            </a:r>
+            <a:r>
+              <a:rPr lang="fa-IR" dirty="0" err="1"/>
+              <a:t>دابل</a:t>
+            </a:r>
+            <a:r>
+              <a:rPr lang="fa-IR" dirty="0"/>
+              <a:t> کلیک کردید و سایت باز شد، نوشته  را بخوان و دکمه کنارش رو بزن بعد وارد سایت </a:t>
+            </a:r>
+            <a:r>
+              <a:rPr lang="fa-IR" dirty="0" err="1"/>
+              <a:t>آپارات</a:t>
+            </a:r>
+            <a:r>
+              <a:rPr lang="fa-IR" dirty="0"/>
+              <a:t> می شوی.</a:t>
+            </a:r>
+          </a:p>
+          <a:p>
+            <a:pPr algn="r" rtl="1"/>
+            <a:r>
+              <a:rPr lang="fa-IR" dirty="0"/>
+              <a:t>اگر شما می خواهید یک درسی که این جا </a:t>
+            </a:r>
+            <a:r>
+              <a:rPr lang="fa-IR" dirty="0" err="1"/>
+              <a:t>نمی</a:t>
+            </a:r>
+            <a:r>
+              <a:rPr lang="fa-IR" dirty="0"/>
+              <a:t> دهم را به شما یاد دهم؟ اگه می خواهید این کار را بکنم به ایمیل </a:t>
+            </a:r>
+            <a:r>
+              <a:rPr lang="en-US" dirty="0">
+                <a:hlinkClick r:id="rId2"/>
+              </a:rPr>
+              <a:t>mahsa.mehregan242@gmail.com</a:t>
+            </a:r>
+            <a:r>
+              <a:rPr lang="en-US" dirty="0"/>
+              <a:t> </a:t>
+            </a:r>
+            <a:r>
+              <a:rPr lang="fa-IR" dirty="0"/>
+              <a:t> بنویسید</a:t>
+            </a:r>
+            <a:r>
+              <a:rPr lang="fa-IR" dirty="0">
+                <a:sym typeface="Wingdings" pitchFamily="2" charset="2"/>
+              </a:rPr>
+              <a:t>:((</a:t>
+            </a:r>
+            <a:r>
+              <a:rPr lang="fa-IR" dirty="0"/>
+              <a:t> من </a:t>
+            </a:r>
+            <a:r>
+              <a:rPr lang="fa-IR" dirty="0" err="1"/>
+              <a:t>پاور</a:t>
+            </a:r>
+            <a:r>
+              <a:rPr lang="fa-IR" dirty="0"/>
+              <a:t> پوینت درس برنامه </a:t>
+            </a:r>
+            <a:r>
+              <a:rPr lang="fa-IR" dirty="0" err="1"/>
+              <a:t>نویسی</a:t>
+            </a:r>
+            <a:r>
+              <a:rPr lang="fa-IR" dirty="0"/>
+              <a:t> شما را خوانده ام و می خواهم درس که شما در </a:t>
+            </a:r>
+            <a:r>
+              <a:rPr lang="fa-IR" dirty="0" err="1"/>
+              <a:t>پاور</a:t>
+            </a:r>
+            <a:r>
+              <a:rPr lang="fa-IR" dirty="0"/>
+              <a:t> پوینت توضیح </a:t>
+            </a:r>
+            <a:r>
+              <a:rPr lang="fa-IR" dirty="0" err="1"/>
+              <a:t>نمی</a:t>
+            </a:r>
+            <a:r>
+              <a:rPr lang="fa-IR" dirty="0"/>
+              <a:t> دهید بعد از درس ۴ را می خواهم یاد بگیرم)) بعد من در آن روز یا </a:t>
+            </a:r>
+            <a:r>
+              <a:rPr lang="fa-IR" dirty="0" err="1"/>
+              <a:t>فردایش</a:t>
+            </a:r>
+            <a:r>
+              <a:rPr lang="fa-IR" dirty="0"/>
+              <a:t> بهتون جواب می دهم شما در </a:t>
+            </a:r>
+            <a:r>
+              <a:rPr lang="fa-IR" dirty="0" err="1"/>
+              <a:t>ایمیلی</a:t>
+            </a:r>
+            <a:r>
+              <a:rPr lang="fa-IR" dirty="0"/>
+              <a:t> که ارسال می کنید ، </a:t>
+            </a:r>
+            <a:r>
+              <a:rPr lang="fa-IR" dirty="0" err="1"/>
+              <a:t>پایینش</a:t>
+            </a:r>
+            <a:r>
+              <a:rPr lang="fa-IR" dirty="0"/>
+              <a:t> شماره تماس و </a:t>
+            </a:r>
+            <a:r>
+              <a:rPr lang="fa-IR" dirty="0" err="1"/>
+              <a:t>ایمیلتون</a:t>
+            </a:r>
+            <a:r>
+              <a:rPr lang="fa-IR" dirty="0"/>
+              <a:t> رو بنویسید بعد من بهتون </a:t>
+            </a:r>
+            <a:r>
+              <a:rPr lang="fa-IR" dirty="0" err="1"/>
+              <a:t>ززنگ</a:t>
+            </a:r>
+            <a:r>
+              <a:rPr lang="fa-IR" dirty="0"/>
+              <a:t> می زنم و جواب رو می گویم اگر اشغال بودید بهتون در </a:t>
+            </a:r>
+            <a:r>
+              <a:rPr lang="fa-IR" dirty="0" err="1"/>
+              <a:t>پیامک</a:t>
+            </a:r>
+            <a:r>
+              <a:rPr lang="fa-IR" dirty="0"/>
+              <a:t> و ایمیل جواب رو می فرستم . با سپاس سید یارا ناظم زاده</a:t>
+            </a:r>
           </a:p>
         </p:txBody>
       </p:sp>

--- a/cb-point/درس برنامه نویسیe158AM2.pptx
+++ b/cb-point/درس برنامه نویسیe158AM2.pptx
@@ -3988,7 +3988,15 @@
             </a:pPr>
             <a:r>
               <a:rPr lang="fa-IR" dirty="0"/>
-              <a:t>۳ – لیست زبان ها :</a:t>
+              <a:t>۳ – لیست زبان ها</a:t>
+            </a:r>
+            <a:r>
+              <a:rPr lang="en-US" dirty="0"/>
+              <a:t> </a:t>
+            </a:r>
+            <a:r>
+              <a:rPr lang="fa-IR" dirty="0"/>
+              <a:t> برای ساخت سایت ساده و پایه :</a:t>
             </a:r>
           </a:p>
           <a:p>

--- a/cb-point/درس برنامه نویسیe158AM2.pptx
+++ b/cb-point/درس برنامه نویسیe158AM2.pptx
@@ -4814,7 +4814,7 @@
             <a:pPr marL="0" algn="r" defTabSz="914400" rtl="1" eaLnBrk="1" latinLnBrk="0" hangingPunct="1"/>
             <a:r>
               <a:rPr lang="fa-IR" dirty="0"/>
-              <a:t>۲۲ </a:t>
+              <a:t>۲ </a:t>
             </a:r>
             <a:r>
               <a:rPr lang="fa-IR" dirty="0" err="1"/>
@@ -4838,7 +4838,7 @@
             </a:r>
             <a:r>
               <a:rPr lang="fa-IR" dirty="0"/>
-              <a:t> نشان لینوکس و </a:t>
+              <a:t> نشانه لینوکس و </a:t>
             </a:r>
             <a:r>
               <a:rPr lang="fa-IR" dirty="0" err="1"/>

--- a/cb-point/درس برنامه نویسیe158AM2.pptx
+++ b/cb-point/درس برنامه نویسیe158AM2.pptx
@@ -5276,6 +5276,43 @@
               </a:rPr>
               <a:t>&lt;/title&gt;</a:t>
             </a:r>
+            <a:endParaRPr lang="fa-IR" dirty="0">
+              <a:sym typeface="Wingdings" pitchFamily="2" charset="2"/>
+            </a:endParaRPr>
+          </a:p>
+          <a:p>
+            <a:pPr algn="r" rtl="1"/>
+            <a:r>
+              <a:rPr lang="en-US" dirty="0"/>
+              <a:t>&lt;link </a:t>
+            </a:r>
+            <a:r>
+              <a:rPr lang="en-US" dirty="0" err="1"/>
+              <a:t>rel</a:t>
+            </a:r>
+            <a:r>
+              <a:rPr lang="en-US" dirty="0"/>
+              <a:t>="stylesheet" </a:t>
+            </a:r>
+            <a:r>
+              <a:rPr lang="en-US" dirty="0" err="1"/>
+              <a:t>href</a:t>
+            </a:r>
+            <a:r>
+              <a:rPr lang="en-US" dirty="0"/>
+              <a:t>="</a:t>
+            </a:r>
+            <a:r>
+              <a:rPr lang="en-US" dirty="0" err="1"/>
+              <a:t>style.css</a:t>
+            </a:r>
+            <a:r>
+              <a:rPr lang="en-US" dirty="0"/>
+              <a:t>"&gt;</a:t>
+            </a:r>
+            <a:endParaRPr lang="en-US" dirty="0">
+              <a:sym typeface="Wingdings" pitchFamily="2" charset="2"/>
+            </a:endParaRPr>
           </a:p>
           <a:p>
             <a:pPr marL="228600" indent="-228600" algn="r" defTabSz="914400" rtl="1" eaLnBrk="1" latinLnBrk="0" hangingPunct="1">
@@ -5786,15 +5823,7 @@
             </a:r>
             <a:r>
               <a:rPr lang="fa-IR" dirty="0"/>
-              <a:t>  لینک </a:t>
-            </a:r>
-            <a:r>
-              <a:rPr lang="fa-IR" dirty="0" err="1"/>
-              <a:t>گزاشتیم</a:t>
-            </a:r>
-            <a:r>
-              <a:rPr lang="fa-IR" dirty="0"/>
-              <a:t>.</a:t>
+              <a:t>  لینک گذاشتیم.</a:t>
             </a:r>
           </a:p>
           <a:p>

--- a/cb-point/درس برنامه نویسیe158AM2.pptx
+++ b/cb-point/درس برنامه نویسیe158AM2.pptx
@@ -5971,15 +5971,7 @@
             </a:r>
             <a:r>
               <a:rPr lang="fa-IR" dirty="0"/>
-              <a:t> رو بنویسید بعد من بهتون </a:t>
-            </a:r>
-            <a:r>
-              <a:rPr lang="fa-IR" dirty="0" err="1"/>
-              <a:t>ززنگ</a:t>
-            </a:r>
-            <a:r>
-              <a:rPr lang="fa-IR" dirty="0"/>
-              <a:t> می زنم و جواب رو می گویم اگر اشغال بودید بهتون در </a:t>
+              <a:t> رو بنویسید بعد من بهتون زنگ می زنم و جواب رو می گویم اگر اشغال بودید بهتون در </a:t>
             </a:r>
             <a:r>
               <a:rPr lang="fa-IR" dirty="0" err="1"/>
